--- a/probability_and_statistics/4_probability_distribution/Stats-PDF-3-Discrete-Poisson-Distribution.pptx
+++ b/probability_and_statistics/4_probability_distribution/Stats-PDF-3-Discrete-Poisson-Distribution.pptx
@@ -5,22 +5,23 @@
     <p:sldMasterId id="2147483648" r:id="rId1"/>
   </p:sldMasterIdLst>
   <p:notesMasterIdLst>
-    <p:notesMasterId r:id="rId12"/>
+    <p:notesMasterId r:id="rId13"/>
   </p:notesMasterIdLst>
   <p:handoutMasterIdLst>
-    <p:handoutMasterId r:id="rId13"/>
+    <p:handoutMasterId r:id="rId14"/>
   </p:handoutMasterIdLst>
   <p:sldIdLst>
     <p:sldId id="283" r:id="rId2"/>
     <p:sldId id="282" r:id="rId3"/>
-    <p:sldId id="281" r:id="rId4"/>
-    <p:sldId id="287" r:id="rId5"/>
-    <p:sldId id="289" r:id="rId6"/>
-    <p:sldId id="286" r:id="rId7"/>
-    <p:sldId id="292" r:id="rId8"/>
-    <p:sldId id="290" r:id="rId9"/>
-    <p:sldId id="291" r:id="rId10"/>
-    <p:sldId id="288" r:id="rId11"/>
+    <p:sldId id="293" r:id="rId4"/>
+    <p:sldId id="281" r:id="rId5"/>
+    <p:sldId id="287" r:id="rId6"/>
+    <p:sldId id="289" r:id="rId7"/>
+    <p:sldId id="286" r:id="rId8"/>
+    <p:sldId id="292" r:id="rId9"/>
+    <p:sldId id="290" r:id="rId10"/>
+    <p:sldId id="291" r:id="rId11"/>
+    <p:sldId id="288" r:id="rId12"/>
   </p:sldIdLst>
   <p:sldSz cx="12192000" cy="6858000"/>
   <p:notesSz cx="6858000" cy="9144000"/>
@@ -224,7 +225,7 @@
           <a:p>
             <a:fld id="{7BAEECA8-D063-486F-AE31-5020270C1449}" type="datetimeFigureOut">
               <a:rPr lang="en-US" smtClean="0"/>
-              <a:t>10/11/2025</a:t>
+              <a:t>4/6/2026</a:t>
             </a:fld>
             <a:endParaRPr lang="en-US"/>
           </a:p>
@@ -401,7 +402,7 @@
           <a:p>
             <a:fld id="{7826FB1B-3C5D-47CA-A24A-29700CC75407}" type="datetimeFigureOut">
               <a:rPr lang="en-US" smtClean="0"/>
-              <a:t>10/11/2025</a:t>
+              <a:t>4/6/2026</a:t>
             </a:fld>
             <a:endParaRPr lang="en-US"/>
           </a:p>
@@ -733,7 +734,7 @@
           <a:p>
             <a:fld id="{B5EA14F7-8D1F-4281-97DA-194F5085C7FA}" type="slidenum">
               <a:rPr lang="en-US" smtClean="0"/>
-              <a:t>3</a:t>
+              <a:t>4</a:t>
             </a:fld>
             <a:endParaRPr lang="en-US"/>
           </a:p>
@@ -841,7 +842,7 @@
           <a:p>
             <a:fld id="{B5EA14F7-8D1F-4281-97DA-194F5085C7FA}" type="slidenum">
               <a:rPr lang="en-US" smtClean="0"/>
-              <a:t>4</a:t>
+              <a:t>5</a:t>
             </a:fld>
             <a:endParaRPr lang="en-US"/>
           </a:p>
@@ -949,7 +950,7 @@
           <a:p>
             <a:fld id="{B5EA14F7-8D1F-4281-97DA-194F5085C7FA}" type="slidenum">
               <a:rPr lang="en-US" smtClean="0"/>
-              <a:t>5</a:t>
+              <a:t>6</a:t>
             </a:fld>
             <a:endParaRPr lang="en-US"/>
           </a:p>
@@ -1057,7 +1058,7 @@
           <a:p>
             <a:fld id="{B5EA14F7-8D1F-4281-97DA-194F5085C7FA}" type="slidenum">
               <a:rPr lang="en-US" smtClean="0"/>
-              <a:t>6</a:t>
+              <a:t>7</a:t>
             </a:fld>
             <a:endParaRPr lang="en-US"/>
           </a:p>
@@ -1165,7 +1166,7 @@
           <a:p>
             <a:fld id="{B5EA14F7-8D1F-4281-97DA-194F5085C7FA}" type="slidenum">
               <a:rPr lang="en-US" smtClean="0"/>
-              <a:t>7</a:t>
+              <a:t>8</a:t>
             </a:fld>
             <a:endParaRPr lang="en-US"/>
           </a:p>
@@ -1331,7 +1332,7 @@
           <a:p>
             <a:fld id="{6383FAE1-13DE-4511-8C1B-C8AFB720664C}" type="datetimeFigureOut">
               <a:rPr lang="en-US" smtClean="0"/>
-              <a:t>10/11/2025</a:t>
+              <a:t>4/6/2026</a:t>
             </a:fld>
             <a:endParaRPr lang="en-US"/>
           </a:p>
@@ -1529,7 +1530,7 @@
           <a:p>
             <a:fld id="{6383FAE1-13DE-4511-8C1B-C8AFB720664C}" type="datetimeFigureOut">
               <a:rPr lang="en-US" smtClean="0"/>
-              <a:t>10/11/2025</a:t>
+              <a:t>4/6/2026</a:t>
             </a:fld>
             <a:endParaRPr lang="en-US"/>
           </a:p>
@@ -1737,7 +1738,7 @@
           <a:p>
             <a:fld id="{6383FAE1-13DE-4511-8C1B-C8AFB720664C}" type="datetimeFigureOut">
               <a:rPr lang="en-US" smtClean="0"/>
-              <a:t>10/11/2025</a:t>
+              <a:t>4/6/2026</a:t>
             </a:fld>
             <a:endParaRPr lang="en-US"/>
           </a:p>
@@ -1935,7 +1936,7 @@
           <a:p>
             <a:fld id="{6383FAE1-13DE-4511-8C1B-C8AFB720664C}" type="datetimeFigureOut">
               <a:rPr lang="en-US" smtClean="0"/>
-              <a:t>10/11/2025</a:t>
+              <a:t>4/6/2026</a:t>
             </a:fld>
             <a:endParaRPr lang="en-US"/>
           </a:p>
@@ -2210,7 +2211,7 @@
           <a:p>
             <a:fld id="{6383FAE1-13DE-4511-8C1B-C8AFB720664C}" type="datetimeFigureOut">
               <a:rPr lang="en-US" smtClean="0"/>
-              <a:t>10/11/2025</a:t>
+              <a:t>4/6/2026</a:t>
             </a:fld>
             <a:endParaRPr lang="en-US"/>
           </a:p>
@@ -2475,7 +2476,7 @@
           <a:p>
             <a:fld id="{6383FAE1-13DE-4511-8C1B-C8AFB720664C}" type="datetimeFigureOut">
               <a:rPr lang="en-US" smtClean="0"/>
-              <a:t>10/11/2025</a:t>
+              <a:t>4/6/2026</a:t>
             </a:fld>
             <a:endParaRPr lang="en-US"/>
           </a:p>
@@ -2887,7 +2888,7 @@
           <a:p>
             <a:fld id="{6383FAE1-13DE-4511-8C1B-C8AFB720664C}" type="datetimeFigureOut">
               <a:rPr lang="en-US" smtClean="0"/>
-              <a:t>10/11/2025</a:t>
+              <a:t>4/6/2026</a:t>
             </a:fld>
             <a:endParaRPr lang="en-US"/>
           </a:p>
@@ -3028,7 +3029,7 @@
           <a:p>
             <a:fld id="{6383FAE1-13DE-4511-8C1B-C8AFB720664C}" type="datetimeFigureOut">
               <a:rPr lang="en-US" smtClean="0"/>
-              <a:t>10/11/2025</a:t>
+              <a:t>4/6/2026</a:t>
             </a:fld>
             <a:endParaRPr lang="en-US"/>
           </a:p>
@@ -3141,7 +3142,7 @@
           <a:p>
             <a:fld id="{6383FAE1-13DE-4511-8C1B-C8AFB720664C}" type="datetimeFigureOut">
               <a:rPr lang="en-US" smtClean="0"/>
-              <a:t>10/11/2025</a:t>
+              <a:t>4/6/2026</a:t>
             </a:fld>
             <a:endParaRPr lang="en-US"/>
           </a:p>
@@ -3452,7 +3453,7 @@
           <a:p>
             <a:fld id="{6383FAE1-13DE-4511-8C1B-C8AFB720664C}" type="datetimeFigureOut">
               <a:rPr lang="en-US" smtClean="0"/>
-              <a:t>10/11/2025</a:t>
+              <a:t>4/6/2026</a:t>
             </a:fld>
             <a:endParaRPr lang="en-US"/>
           </a:p>
@@ -3743,7 +3744,7 @@
           <a:p>
             <a:fld id="{6383FAE1-13DE-4511-8C1B-C8AFB720664C}" type="datetimeFigureOut">
               <a:rPr lang="en-US" smtClean="0"/>
-              <a:t>10/11/2025</a:t>
+              <a:t>4/6/2026</a:t>
             </a:fld>
             <a:endParaRPr lang="en-US"/>
           </a:p>
@@ -3987,7 +3988,7 @@
           <a:p>
             <a:fld id="{6383FAE1-13DE-4511-8C1B-C8AFB720664C}" type="datetimeFigureOut">
               <a:rPr lang="en-US" smtClean="0"/>
-              <a:t>10/11/2025</a:t>
+              <a:t>4/6/2026</a:t>
             </a:fld>
             <a:endParaRPr lang="en-US"/>
           </a:p>
@@ -4798,6 +4799,175 @@
 </file>
 
 <file path=ppt/slides/slide10.xml><?xml version="1.0" encoding="utf-8"?>
+<p:sld xmlns:a="http://schemas.openxmlformats.org/drawingml/2006/main" xmlns:r="http://schemas.openxmlformats.org/officeDocument/2006/relationships" xmlns:p="http://schemas.openxmlformats.org/presentationml/2006/main">
+  <p:cSld>
+    <p:spTree>
+      <p:nvGrpSpPr>
+        <p:cNvPr id="1" name="">
+          <a:extLst>
+            <a:ext uri="{FF2B5EF4-FFF2-40B4-BE49-F238E27FC236}">
+              <a16:creationId xmlns:a16="http://schemas.microsoft.com/office/drawing/2014/main" id="{8DD5416A-2A86-425A-C4C1-55D6D479F922}"/>
+            </a:ext>
+          </a:extLst>
+        </p:cNvPr>
+        <p:cNvGrpSpPr/>
+        <p:nvPr/>
+      </p:nvGrpSpPr>
+      <p:grpSpPr>
+        <a:xfrm>
+          <a:off x="0" y="0"/>
+          <a:ext cx="0" cy="0"/>
+          <a:chOff x="0" y="0"/>
+          <a:chExt cx="0" cy="0"/>
+        </a:xfrm>
+      </p:grpSpPr>
+      <p:sp>
+        <p:nvSpPr>
+          <p:cNvPr id="6" name="TextBox 5">
+            <a:extLst>
+              <a:ext uri="{FF2B5EF4-FFF2-40B4-BE49-F238E27FC236}">
+                <a16:creationId xmlns:a16="http://schemas.microsoft.com/office/drawing/2014/main" id="{F58747AF-4CDB-80FE-F3F0-6DBDFAB859CF}"/>
+              </a:ext>
+            </a:extLst>
+          </p:cNvPr>
+          <p:cNvSpPr txBox="1"/>
+          <p:nvPr/>
+        </p:nvSpPr>
+        <p:spPr>
+          <a:xfrm>
+            <a:off x="2002536" y="171950"/>
+            <a:ext cx="8215884" cy="400110"/>
+          </a:xfrm>
+          <a:prstGeom prst="rect">
+            <a:avLst/>
+          </a:prstGeom>
+          <a:noFill/>
+        </p:spPr>
+        <p:txBody>
+          <a:bodyPr wrap="square">
+            <a:spAutoFit/>
+          </a:bodyPr>
+          <a:lstStyle/>
+          <a:p>
+            <a:pPr algn="ctr"/>
+            <a:r>
+              <a:rPr lang="en-US" sz="2000" b="1" dirty="0">
+                <a:solidFill>
+                  <a:schemeClr val="accent6">
+                    <a:lumMod val="40000"/>
+                    <a:lumOff val="60000"/>
+                  </a:schemeClr>
+                </a:solidFill>
+              </a:rPr>
+              <a:t>Poisson Distribution</a:t>
+            </a:r>
+          </a:p>
+        </p:txBody>
+      </p:sp>
+      <p:pic>
+        <p:nvPicPr>
+          <p:cNvPr id="11" name="Picture 10">
+            <a:extLst>
+              <a:ext uri="{FF2B5EF4-FFF2-40B4-BE49-F238E27FC236}">
+                <a16:creationId xmlns:a16="http://schemas.microsoft.com/office/drawing/2014/main" id="{2BDCF185-2D42-DF60-E22E-7625CE71FC64}"/>
+              </a:ext>
+            </a:extLst>
+          </p:cNvPr>
+          <p:cNvPicPr>
+            <a:picLocks noChangeAspect="1"/>
+          </p:cNvPicPr>
+          <p:nvPr/>
+        </p:nvPicPr>
+        <p:blipFill>
+          <a:blip r:embed="rId2"/>
+          <a:stretch>
+            <a:fillRect/>
+          </a:stretch>
+        </p:blipFill>
+        <p:spPr>
+          <a:xfrm>
+            <a:off x="6509385" y="2585304"/>
+            <a:ext cx="1957959" cy="714693"/>
+          </a:xfrm>
+          <a:prstGeom prst="rect">
+            <a:avLst/>
+          </a:prstGeom>
+        </p:spPr>
+      </p:pic>
+      <p:pic>
+        <p:nvPicPr>
+          <p:cNvPr id="13" name="Picture 12">
+            <a:extLst>
+              <a:ext uri="{FF2B5EF4-FFF2-40B4-BE49-F238E27FC236}">
+                <a16:creationId xmlns:a16="http://schemas.microsoft.com/office/drawing/2014/main" id="{43AAC2F2-0FE1-1F05-53F3-2E60B6606FFE}"/>
+              </a:ext>
+            </a:extLst>
+          </p:cNvPr>
+          <p:cNvPicPr>
+            <a:picLocks noChangeAspect="1"/>
+          </p:cNvPicPr>
+          <p:nvPr/>
+        </p:nvPicPr>
+        <p:blipFill>
+          <a:blip r:embed="rId2"/>
+          <a:stretch>
+            <a:fillRect/>
+          </a:stretch>
+        </p:blipFill>
+        <p:spPr>
+          <a:xfrm>
+            <a:off x="7602396" y="0"/>
+            <a:ext cx="1957959" cy="714693"/>
+          </a:xfrm>
+          <a:prstGeom prst="rect">
+            <a:avLst/>
+          </a:prstGeom>
+        </p:spPr>
+      </p:pic>
+      <p:pic>
+        <p:nvPicPr>
+          <p:cNvPr id="3" name="Picture 2">
+            <a:extLst>
+              <a:ext uri="{FF2B5EF4-FFF2-40B4-BE49-F238E27FC236}">
+                <a16:creationId xmlns:a16="http://schemas.microsoft.com/office/drawing/2014/main" id="{A3E39F0D-F5AE-611F-AC9A-7CE08728B4D9}"/>
+              </a:ext>
+            </a:extLst>
+          </p:cNvPr>
+          <p:cNvPicPr>
+            <a:picLocks noChangeAspect="1"/>
+          </p:cNvPicPr>
+          <p:nvPr/>
+        </p:nvPicPr>
+        <p:blipFill>
+          <a:blip r:embed="rId3"/>
+          <a:stretch>
+            <a:fillRect/>
+          </a:stretch>
+        </p:blipFill>
+        <p:spPr>
+          <a:xfrm>
+            <a:off x="1787462" y="1097279"/>
+            <a:ext cx="7354683" cy="4871661"/>
+          </a:xfrm>
+          <a:prstGeom prst="rect">
+            <a:avLst/>
+          </a:prstGeom>
+        </p:spPr>
+      </p:pic>
+    </p:spTree>
+    <p:extLst>
+      <p:ext uri="{BB962C8B-B14F-4D97-AF65-F5344CB8AC3E}">
+        <p14:creationId xmlns:p14="http://schemas.microsoft.com/office/powerpoint/2010/main" val="2254600426"/>
+      </p:ext>
+    </p:extLst>
+  </p:cSld>
+  <p:clrMapOvr>
+    <a:masterClrMapping/>
+  </p:clrMapOvr>
+</p:sld>
+</file>
+
+<file path=ppt/slides/slide11.xml><?xml version="1.0" encoding="utf-8"?>
 <p:sld xmlns:a="http://schemas.openxmlformats.org/drawingml/2006/main" xmlns:r="http://schemas.openxmlformats.org/officeDocument/2006/relationships" xmlns:p="http://schemas.openxmlformats.org/presentationml/2006/main">
   <p:cSld>
     <p:spTree>
@@ -5971,372 +6141,6 @@
           <a:chExt cx="0" cy="0"/>
         </a:xfrm>
       </p:grpSpPr>
-      <mc:AlternateContent xmlns:mc="http://schemas.openxmlformats.org/markup-compatibility/2006" xmlns:a14="http://schemas.microsoft.com/office/drawing/2010/main">
-        <mc:Choice Requires="a14">
-          <p:sp>
-            <p:nvSpPr>
-              <p:cNvPr id="5" name="TextBox 4">
-                <a:extLst>
-                  <a:ext uri="{FF2B5EF4-FFF2-40B4-BE49-F238E27FC236}">
-                    <a16:creationId xmlns:a16="http://schemas.microsoft.com/office/drawing/2014/main" id="{95D78EB7-80BB-D862-C733-CEADB43DE1F6}"/>
-                  </a:ext>
-                </a:extLst>
-              </p:cNvPr>
-              <p:cNvSpPr txBox="1"/>
-              <p:nvPr/>
-            </p:nvSpPr>
-            <p:spPr>
-              <a:xfrm>
-                <a:off x="233172" y="1015645"/>
-                <a:ext cx="11023092" cy="3139321"/>
-              </a:xfrm>
-              <a:prstGeom prst="rect">
-                <a:avLst/>
-              </a:prstGeom>
-              <a:noFill/>
-            </p:spPr>
-            <p:txBody>
-              <a:bodyPr wrap="square">
-                <a:spAutoFit/>
-              </a:bodyPr>
-              <a:lstStyle/>
-              <a:p>
-                <a:pPr>
-                  <a:buNone/>
-                </a:pPr>
-                <a:r>
-                  <a:rPr lang="en-US" dirty="0">
-                    <a:solidFill>
-                      <a:schemeClr val="accent6">
-                        <a:lumMod val="60000"/>
-                        <a:lumOff val="40000"/>
-                      </a:schemeClr>
-                    </a:solidFill>
-                  </a:rPr>
-                  <a:t>The </a:t>
-                </a:r>
-                <a:r>
-                  <a:rPr lang="en-US" b="1" dirty="0">
-                    <a:solidFill>
-                      <a:schemeClr val="accent6">
-                        <a:lumMod val="60000"/>
-                        <a:lumOff val="40000"/>
-                      </a:schemeClr>
-                    </a:solidFill>
-                  </a:rPr>
-                  <a:t>Poisson distribution</a:t>
-                </a:r>
-                <a:r>
-                  <a:rPr lang="en-US" dirty="0">
-                    <a:solidFill>
-                      <a:schemeClr val="accent6">
-                        <a:lumMod val="60000"/>
-                        <a:lumOff val="40000"/>
-                      </a:schemeClr>
-                    </a:solidFill>
-                  </a:rPr>
-                  <a:t> is a </a:t>
-                </a:r>
-                <a:r>
-                  <a:rPr lang="en-US" b="1" dirty="0">
-                    <a:solidFill>
-                      <a:schemeClr val="accent6">
-                        <a:lumMod val="60000"/>
-                        <a:lumOff val="40000"/>
-                      </a:schemeClr>
-                    </a:solidFill>
-                  </a:rPr>
-                  <a:t>discrete probability distribution</a:t>
-                </a:r>
-                <a:r>
-                  <a:rPr lang="en-US" dirty="0">
-                    <a:solidFill>
-                      <a:schemeClr val="accent6">
-                        <a:lumMod val="60000"/>
-                        <a:lumOff val="40000"/>
-                      </a:schemeClr>
-                    </a:solidFill>
-                  </a:rPr>
-                  <a:t> that gives the probability of a certain number of events happening in a </a:t>
-                </a:r>
-                <a:r>
-                  <a:rPr lang="en-US" b="1" dirty="0">
-                    <a:solidFill>
-                      <a:schemeClr val="accent6">
-                        <a:lumMod val="60000"/>
-                        <a:lumOff val="40000"/>
-                      </a:schemeClr>
-                    </a:solidFill>
-                  </a:rPr>
-                  <a:t>fixed interval of time, distance, area, or volume. </a:t>
-                </a:r>
-                <a:r>
-                  <a:rPr lang="en-US" dirty="0">
-                    <a:solidFill>
-                      <a:schemeClr val="accent6">
-                        <a:lumMod val="60000"/>
-                        <a:lumOff val="40000"/>
-                      </a:schemeClr>
-                    </a:solidFill>
-                  </a:rPr>
-                  <a:t> We assume that these events occur</a:t>
-                </a:r>
-              </a:p>
-              <a:p>
-                <a:pPr marL="285750" indent="-285750">
-                  <a:buFont typeface="Arial" panose="020B0604020202020204" pitchFamily="34" charset="0"/>
-                  <a:buChar char="•"/>
-                </a:pPr>
-                <a:r>
-                  <a:rPr lang="en-US" b="1" dirty="0">
-                    <a:solidFill>
-                      <a:schemeClr val="accent6">
-                        <a:lumMod val="60000"/>
-                        <a:lumOff val="40000"/>
-                      </a:schemeClr>
-                    </a:solidFill>
-                  </a:rPr>
-                  <a:t>Independently</a:t>
-                </a:r>
-                <a:r>
-                  <a:rPr lang="en-US" dirty="0">
-                    <a:solidFill>
-                      <a:schemeClr val="accent6">
-                        <a:lumMod val="60000"/>
-                        <a:lumOff val="40000"/>
-                      </a:schemeClr>
-                    </a:solidFill>
-                  </a:rPr>
-                  <a:t> of each other, and</a:t>
-                </a:r>
-              </a:p>
-              <a:p>
-                <a:pPr marL="285750" indent="-285750">
-                  <a:buFont typeface="Arial" panose="020B0604020202020204" pitchFamily="34" charset="0"/>
-                  <a:buChar char="•"/>
-                </a:pPr>
-                <a:r>
-                  <a:rPr lang="en-US" dirty="0">
-                    <a:solidFill>
-                      <a:schemeClr val="accent6">
-                        <a:lumMod val="60000"/>
-                        <a:lumOff val="40000"/>
-                      </a:schemeClr>
-                    </a:solidFill>
-                  </a:rPr>
-                  <a:t>At a </a:t>
-                </a:r>
-                <a:r>
-                  <a:rPr lang="en-US" b="1" dirty="0">
-                    <a:solidFill>
-                      <a:schemeClr val="accent6">
-                        <a:lumMod val="60000"/>
-                        <a:lumOff val="40000"/>
-                      </a:schemeClr>
-                    </a:solidFill>
-                  </a:rPr>
-                  <a:t>constant average rate (λ or “lambda”)</a:t>
-                </a:r>
-                <a:r>
-                  <a:rPr lang="en-US" dirty="0">
-                    <a:solidFill>
-                      <a:schemeClr val="accent6">
-                        <a:lumMod val="60000"/>
-                        <a:lumOff val="40000"/>
-                      </a:schemeClr>
-                    </a:solidFill>
-                  </a:rPr>
-                  <a:t>.</a:t>
-                </a:r>
-              </a:p>
-              <a:p>
-                <a:pPr marL="285750" indent="-285750">
-                  <a:buFont typeface="Arial" panose="020B0604020202020204" pitchFamily="34" charset="0"/>
-                  <a:buChar char="•"/>
-                </a:pPr>
-                <a:endParaRPr lang="en-US" dirty="0">
-                  <a:solidFill>
-                    <a:schemeClr val="accent6">
-                      <a:lumMod val="60000"/>
-                      <a:lumOff val="40000"/>
-                    </a:schemeClr>
-                  </a:solidFill>
-                </a:endParaRPr>
-              </a:p>
-              <a:p>
-                <a:r>
-                  <a:rPr lang="en-US" dirty="0">
-                    <a:solidFill>
-                      <a:schemeClr val="accent6">
-                        <a:lumMod val="60000"/>
-                        <a:lumOff val="40000"/>
-                      </a:schemeClr>
-                    </a:solidFill>
-                  </a:rPr>
-                  <a:t>The probability of getting exactly </a:t>
-                </a:r>
-                <a:r>
-                  <a:rPr lang="en-US" b="1" dirty="0">
-                    <a:solidFill>
-                      <a:schemeClr val="accent6">
-                        <a:lumMod val="60000"/>
-                        <a:lumOff val="40000"/>
-                      </a:schemeClr>
-                    </a:solidFill>
-                  </a:rPr>
-                  <a:t>k</a:t>
-                </a:r>
-                <a:r>
-                  <a:rPr lang="en-US" dirty="0">
-                    <a:solidFill>
-                      <a:schemeClr val="accent6">
-                        <a:lumMod val="60000"/>
-                        <a:lumOff val="40000"/>
-                      </a:schemeClr>
-                    </a:solidFill>
-                  </a:rPr>
-                  <a:t> events in a fixed interval is:</a:t>
-                </a:r>
-              </a:p>
-              <a:p>
-                <a:endParaRPr lang="en-US" dirty="0">
-                  <a:solidFill>
-                    <a:schemeClr val="accent6">
-                      <a:lumMod val="60000"/>
-                      <a:lumOff val="40000"/>
-                    </a:schemeClr>
-                  </a:solidFill>
-                </a:endParaRPr>
-              </a:p>
-              <a:p>
-                <a:endParaRPr lang="en-US" dirty="0">
-                  <a:solidFill>
-                    <a:schemeClr val="accent6">
-                      <a:lumMod val="60000"/>
-                      <a:lumOff val="40000"/>
-                    </a:schemeClr>
-                  </a:solidFill>
-                </a:endParaRPr>
-              </a:p>
-              <a:p>
-                <a:r>
-                  <a:rPr lang="en-US" dirty="0">
-                    <a:solidFill>
-                      <a:schemeClr val="accent6">
-                        <a:lumMod val="60000"/>
-                        <a:lumOff val="40000"/>
-                      </a:schemeClr>
-                    </a:solidFill>
-                  </a:rPr>
-                  <a:t>λ = average number of events (mean rate)</a:t>
-                </a:r>
-              </a:p>
-              <a:p>
-                <a14:m>
-                  <m:oMath xmlns:m="http://schemas.openxmlformats.org/officeDocument/2006/math">
-                    <m:r>
-                      <a:rPr lang="en-US" i="1">
-                        <a:solidFill>
-                          <a:schemeClr val="accent6">
-                            <a:lumMod val="60000"/>
-                            <a:lumOff val="40000"/>
-                          </a:schemeClr>
-                        </a:solidFill>
-                        <a:latin typeface="Cambria Math" panose="02040503050406030204" pitchFamily="18" charset="0"/>
-                      </a:rPr>
-                      <m:t>𝑘</m:t>
-                    </m:r>
-                  </m:oMath>
-                </a14:m>
-                <a:r>
-                  <a:rPr lang="en-US" dirty="0">
-                    <a:solidFill>
-                      <a:schemeClr val="accent6">
-                        <a:lumMod val="60000"/>
-                        <a:lumOff val="40000"/>
-                      </a:schemeClr>
-                    </a:solidFill>
-                  </a:rPr>
-                  <a:t>= number of occurrences</a:t>
-                </a:r>
-              </a:p>
-              <a:p>
-                <a14:m>
-                  <m:oMath xmlns:m="http://schemas.openxmlformats.org/officeDocument/2006/math">
-                    <m:r>
-                      <a:rPr lang="en-US" i="1">
-                        <a:solidFill>
-                          <a:schemeClr val="accent6">
-                            <a:lumMod val="60000"/>
-                            <a:lumOff val="40000"/>
-                          </a:schemeClr>
-                        </a:solidFill>
-                        <a:latin typeface="Cambria Math" panose="02040503050406030204" pitchFamily="18" charset="0"/>
-                      </a:rPr>
-                      <m:t>𝑒</m:t>
-                    </m:r>
-                  </m:oMath>
-                </a14:m>
-                <a:r>
-                  <a:rPr lang="en-US" dirty="0">
-                    <a:solidFill>
-                      <a:schemeClr val="accent6">
-                        <a:lumMod val="60000"/>
-                        <a:lumOff val="40000"/>
-                      </a:schemeClr>
-                    </a:solidFill>
-                  </a:rPr>
-                  <a:t>= 2.71828 (Euler’s number)</a:t>
-                </a:r>
-              </a:p>
-            </p:txBody>
-          </p:sp>
-        </mc:Choice>
-        <mc:Fallback xmlns="">
-          <p:sp>
-            <p:nvSpPr>
-              <p:cNvPr id="5" name="TextBox 4">
-                <a:extLst>
-                  <a:ext uri="{FF2B5EF4-FFF2-40B4-BE49-F238E27FC236}">
-                    <a16:creationId xmlns:a16="http://schemas.microsoft.com/office/drawing/2014/main" id="{95D78EB7-80BB-D862-C733-CEADB43DE1F6}"/>
-                  </a:ext>
-                </a:extLst>
-              </p:cNvPr>
-              <p:cNvSpPr txBox="1">
-                <a:spLocks noRot="1" noChangeAspect="1" noMove="1" noResize="1" noEditPoints="1" noAdjustHandles="1" noChangeArrowheads="1" noChangeShapeType="1" noTextEdit="1"/>
-              </p:cNvSpPr>
-              <p:nvPr/>
-            </p:nvSpPr>
-            <p:spPr>
-              <a:xfrm>
-                <a:off x="233172" y="1015645"/>
-                <a:ext cx="11023092" cy="3139321"/>
-              </a:xfrm>
-              <a:prstGeom prst="rect">
-                <a:avLst/>
-              </a:prstGeom>
-              <a:blipFill>
-                <a:blip r:embed="rId3"/>
-                <a:stretch>
-                  <a:fillRect l="-442" t="-1165" b="-2136"/>
-                </a:stretch>
-              </a:blipFill>
-            </p:spPr>
-            <p:txBody>
-              <a:bodyPr/>
-              <a:lstStyle/>
-              <a:p>
-                <a:r>
-                  <a:rPr lang="en-US">
-                    <a:noFill/>
-                  </a:rPr>
-                  <a:t> </a:t>
-                </a:r>
-              </a:p>
-            </p:txBody>
-          </p:sp>
-        </mc:Fallback>
-      </mc:AlternateContent>
       <p:sp>
         <p:nvSpPr>
           <p:cNvPr id="6" name="TextBox 5">
@@ -6394,8 +6198,8 @@
         </p:nvSpPr>
         <p:spPr>
           <a:xfrm>
-            <a:off x="187452" y="4383316"/>
-            <a:ext cx="6707124" cy="2031325"/>
+            <a:off x="187452" y="1310932"/>
+            <a:ext cx="10030968" cy="3046988"/>
           </a:xfrm>
           <a:prstGeom prst="rect">
             <a:avLst/>
@@ -6412,7 +6216,7 @@
               <a:buNone/>
             </a:pPr>
             <a:r>
-              <a:rPr lang="en-US" dirty="0">
+              <a:rPr lang="en-US" sz="2400" dirty="0">
                 <a:solidFill>
                   <a:schemeClr val="accent6">
                     <a:lumMod val="60000"/>
@@ -6420,20 +6224,14 @@
                   </a:schemeClr>
                 </a:solidFill>
               </a:rPr>
-              <a:t>It deals with types of situations where you have </a:t>
-            </a:r>
-            <a:r>
-              <a:rPr lang="en-US">
-                <a:solidFill>
-                  <a:schemeClr val="accent6">
-                    <a:lumMod val="60000"/>
-                    <a:lumOff val="40000"/>
-                  </a:schemeClr>
-                </a:solidFill>
-              </a:rPr>
-              <a:t>to determine (k)</a:t>
-            </a:r>
-            <a:endParaRPr lang="en-US" dirty="0">
+              <a:t>It deals with types of situations where you have to determine (k)</a:t>
+            </a:r>
+          </a:p>
+          <a:p>
+            <a:pPr>
+              <a:buNone/>
+            </a:pPr>
+            <a:endParaRPr lang="en-US" sz="2400" dirty="0">
               <a:solidFill>
                 <a:schemeClr val="accent6">
                   <a:lumMod val="60000"/>
@@ -6448,7 +6246,7 @@
               <a:buChar char="•"/>
             </a:pPr>
             <a:r>
-              <a:rPr lang="en-US" dirty="0">
+              <a:rPr lang="en-US" sz="2400" dirty="0">
                 <a:solidFill>
                   <a:schemeClr val="accent6">
                     <a:lumMod val="60000"/>
@@ -6465,7 +6263,7 @@
               <a:buChar char="•"/>
             </a:pPr>
             <a:r>
-              <a:rPr lang="en-US" dirty="0">
+              <a:rPr lang="en-US" sz="2400" dirty="0">
                 <a:solidFill>
                   <a:schemeClr val="accent6">
                     <a:lumMod val="60000"/>
@@ -6482,7 +6280,7 @@
               <a:buChar char="•"/>
             </a:pPr>
             <a:r>
-              <a:rPr lang="en-US" dirty="0">
+              <a:rPr lang="en-US" sz="2400" dirty="0">
                 <a:solidFill>
                   <a:schemeClr val="accent6">
                     <a:lumMod val="60000"/>
@@ -6499,7 +6297,7 @@
               <a:buChar char="•"/>
             </a:pPr>
             <a:r>
-              <a:rPr lang="en-US" dirty="0">
+              <a:rPr lang="en-US" sz="2400" dirty="0">
                 <a:solidFill>
                   <a:schemeClr val="accent6">
                     <a:lumMod val="60000"/>
@@ -6516,7 +6314,7 @@
               <a:buChar char="•"/>
             </a:pPr>
             <a:r>
-              <a:rPr lang="en-US" dirty="0">
+              <a:rPr lang="en-US" sz="2400" dirty="0">
                 <a:solidFill>
                   <a:schemeClr val="accent6">
                     <a:lumMod val="60000"/>
@@ -6533,7 +6331,7 @@
               <a:buChar char="•"/>
             </a:pPr>
             <a:r>
-              <a:rPr lang="en-US" dirty="0">
+              <a:rPr lang="en-US" sz="2400" dirty="0">
                 <a:solidFill>
                   <a:schemeClr val="accent6">
                     <a:lumMod val="60000"/>
@@ -6548,10 +6346,10 @@
       </p:sp>
       <p:pic>
         <p:nvPicPr>
-          <p:cNvPr id="11" name="Picture 10">
-            <a:extLst>
-              <a:ext uri="{FF2B5EF4-FFF2-40B4-BE49-F238E27FC236}">
-                <a16:creationId xmlns:a16="http://schemas.microsoft.com/office/drawing/2014/main" id="{C431A59E-FD22-8B9B-8DF9-1A468F10D9BC}"/>
+          <p:cNvPr id="13" name="Picture 12">
+            <a:extLst>
+              <a:ext uri="{FF2B5EF4-FFF2-40B4-BE49-F238E27FC236}">
+                <a16:creationId xmlns:a16="http://schemas.microsoft.com/office/drawing/2014/main" id="{3A46F022-66F5-7FA5-70FE-059719C1D6C3}"/>
               </a:ext>
             </a:extLst>
           </p:cNvPr>
@@ -6561,37 +6359,7 @@
           <p:nvPr/>
         </p:nvPicPr>
         <p:blipFill>
-          <a:blip r:embed="rId4"/>
-          <a:stretch>
-            <a:fillRect/>
-          </a:stretch>
-        </p:blipFill>
-        <p:spPr>
-          <a:xfrm>
-            <a:off x="6509385" y="2585304"/>
-            <a:ext cx="1957959" cy="714693"/>
-          </a:xfrm>
-          <a:prstGeom prst="rect">
-            <a:avLst/>
-          </a:prstGeom>
-        </p:spPr>
-      </p:pic>
-      <p:pic>
-        <p:nvPicPr>
-          <p:cNvPr id="13" name="Picture 12">
-            <a:extLst>
-              <a:ext uri="{FF2B5EF4-FFF2-40B4-BE49-F238E27FC236}">
-                <a16:creationId xmlns:a16="http://schemas.microsoft.com/office/drawing/2014/main" id="{3A46F022-66F5-7FA5-70FE-059719C1D6C3}"/>
-              </a:ext>
-            </a:extLst>
-          </p:cNvPr>
-          <p:cNvPicPr>
-            <a:picLocks noChangeAspect="1"/>
-          </p:cNvPicPr>
-          <p:nvPr/>
-        </p:nvPicPr>
-        <p:blipFill>
-          <a:blip r:embed="rId4"/>
+          <a:blip r:embed="rId2"/>
           <a:stretch>
             <a:fillRect/>
           </a:stretch>
@@ -6600,36 +6368,6 @@
           <a:xfrm>
             <a:off x="7602396" y="0"/>
             <a:ext cx="1957959" cy="714693"/>
-          </a:xfrm>
-          <a:prstGeom prst="rect">
-            <a:avLst/>
-          </a:prstGeom>
-        </p:spPr>
-      </p:pic>
-      <p:pic>
-        <p:nvPicPr>
-          <p:cNvPr id="3" name="Picture 2">
-            <a:extLst>
-              <a:ext uri="{FF2B5EF4-FFF2-40B4-BE49-F238E27FC236}">
-                <a16:creationId xmlns:a16="http://schemas.microsoft.com/office/drawing/2014/main" id="{79F4E938-08D5-B500-A281-FE6462B88608}"/>
-              </a:ext>
-            </a:extLst>
-          </p:cNvPr>
-          <p:cNvPicPr>
-            <a:picLocks noChangeAspect="1"/>
-          </p:cNvPicPr>
-          <p:nvPr/>
-        </p:nvPicPr>
-        <p:blipFill>
-          <a:blip r:embed="rId3"/>
-          <a:stretch>
-            <a:fillRect/>
-          </a:stretch>
-        </p:blipFill>
-        <p:spPr>
-          <a:xfrm>
-            <a:off x="6592824" y="4001905"/>
-            <a:ext cx="5064252" cy="1268376"/>
           </a:xfrm>
           <a:prstGeom prst="rect">
             <a:avLst/>
@@ -6650,6 +6388,517 @@
 </file>
 
 <file path=ppt/slides/slide3.xml><?xml version="1.0" encoding="utf-8"?>
+<p:sld xmlns:a="http://schemas.openxmlformats.org/drawingml/2006/main" xmlns:r="http://schemas.openxmlformats.org/officeDocument/2006/relationships" xmlns:p="http://schemas.openxmlformats.org/presentationml/2006/main">
+  <p:cSld>
+    <p:spTree>
+      <p:nvGrpSpPr>
+        <p:cNvPr id="1" name="">
+          <a:extLst>
+            <a:ext uri="{FF2B5EF4-FFF2-40B4-BE49-F238E27FC236}">
+              <a16:creationId xmlns:a16="http://schemas.microsoft.com/office/drawing/2014/main" id="{D3592736-D1E7-F65F-FEE9-A04760F2804F}"/>
+            </a:ext>
+          </a:extLst>
+        </p:cNvPr>
+        <p:cNvGrpSpPr/>
+        <p:nvPr/>
+      </p:nvGrpSpPr>
+      <p:grpSpPr>
+        <a:xfrm>
+          <a:off x="0" y="0"/>
+          <a:ext cx="0" cy="0"/>
+          <a:chOff x="0" y="0"/>
+          <a:chExt cx="0" cy="0"/>
+        </a:xfrm>
+      </p:grpSpPr>
+      <mc:AlternateContent xmlns:mc="http://schemas.openxmlformats.org/markup-compatibility/2006">
+        <mc:Choice xmlns:a14="http://schemas.microsoft.com/office/drawing/2010/main" Requires="a14">
+          <p:sp>
+            <p:nvSpPr>
+              <p:cNvPr id="5" name="TextBox 4">
+                <a:extLst>
+                  <a:ext uri="{FF2B5EF4-FFF2-40B4-BE49-F238E27FC236}">
+                    <a16:creationId xmlns:a16="http://schemas.microsoft.com/office/drawing/2014/main" id="{6A7C003B-68B0-26B1-87B8-1E4D38D72502}"/>
+                  </a:ext>
+                </a:extLst>
+              </p:cNvPr>
+              <p:cNvSpPr txBox="1"/>
+              <p:nvPr/>
+            </p:nvSpPr>
+            <p:spPr>
+              <a:xfrm>
+                <a:off x="233172" y="1015645"/>
+                <a:ext cx="11023092" cy="4524315"/>
+              </a:xfrm>
+              <a:prstGeom prst="rect">
+                <a:avLst/>
+              </a:prstGeom>
+              <a:noFill/>
+            </p:spPr>
+            <p:txBody>
+              <a:bodyPr wrap="square">
+                <a:spAutoFit/>
+              </a:bodyPr>
+              <a:lstStyle/>
+              <a:p>
+                <a:pPr>
+                  <a:buNone/>
+                </a:pPr>
+                <a:r>
+                  <a:rPr lang="en-US" sz="2400" dirty="0">
+                    <a:solidFill>
+                      <a:schemeClr val="accent6">
+                        <a:lumMod val="60000"/>
+                        <a:lumOff val="40000"/>
+                      </a:schemeClr>
+                    </a:solidFill>
+                  </a:rPr>
+                  <a:t>The </a:t>
+                </a:r>
+                <a:r>
+                  <a:rPr lang="en-US" sz="2400" b="1" dirty="0">
+                    <a:solidFill>
+                      <a:schemeClr val="accent6">
+                        <a:lumMod val="60000"/>
+                        <a:lumOff val="40000"/>
+                      </a:schemeClr>
+                    </a:solidFill>
+                  </a:rPr>
+                  <a:t>Poisson distribution</a:t>
+                </a:r>
+                <a:r>
+                  <a:rPr lang="en-US" sz="2400" dirty="0">
+                    <a:solidFill>
+                      <a:schemeClr val="accent6">
+                        <a:lumMod val="60000"/>
+                        <a:lumOff val="40000"/>
+                      </a:schemeClr>
+                    </a:solidFill>
+                  </a:rPr>
+                  <a:t> is a </a:t>
+                </a:r>
+                <a:r>
+                  <a:rPr lang="en-US" sz="2400" b="1" dirty="0">
+                    <a:solidFill>
+                      <a:schemeClr val="accent6">
+                        <a:lumMod val="60000"/>
+                        <a:lumOff val="40000"/>
+                      </a:schemeClr>
+                    </a:solidFill>
+                  </a:rPr>
+                  <a:t>discrete probability distribution</a:t>
+                </a:r>
+                <a:r>
+                  <a:rPr lang="en-US" sz="2400" dirty="0">
+                    <a:solidFill>
+                      <a:schemeClr val="accent6">
+                        <a:lumMod val="60000"/>
+                        <a:lumOff val="40000"/>
+                      </a:schemeClr>
+                    </a:solidFill>
+                  </a:rPr>
+                  <a:t> that gives the probability of a certain number of events happening in a </a:t>
+                </a:r>
+                <a:r>
+                  <a:rPr lang="en-US" sz="2400" b="1" dirty="0">
+                    <a:solidFill>
+                      <a:schemeClr val="accent6">
+                        <a:lumMod val="60000"/>
+                        <a:lumOff val="40000"/>
+                      </a:schemeClr>
+                    </a:solidFill>
+                  </a:rPr>
+                  <a:t>fixed interval of time, distance, area, or volume. </a:t>
+                </a:r>
+                <a:r>
+                  <a:rPr lang="en-US" sz="2400" dirty="0">
+                    <a:solidFill>
+                      <a:schemeClr val="accent6">
+                        <a:lumMod val="60000"/>
+                        <a:lumOff val="40000"/>
+                      </a:schemeClr>
+                    </a:solidFill>
+                  </a:rPr>
+                  <a:t> </a:t>
+                </a:r>
+              </a:p>
+              <a:p>
+                <a:pPr>
+                  <a:buNone/>
+                </a:pPr>
+                <a:r>
+                  <a:rPr lang="en-US" sz="2400" dirty="0">
+                    <a:solidFill>
+                      <a:schemeClr val="accent6">
+                        <a:lumMod val="60000"/>
+                        <a:lumOff val="40000"/>
+                      </a:schemeClr>
+                    </a:solidFill>
+                  </a:rPr>
+                  <a:t>We assume that these events occur</a:t>
+                </a:r>
+              </a:p>
+              <a:p>
+                <a:pPr marL="285750" indent="-285750">
+                  <a:buFont typeface="Arial" panose="020B0604020202020204" pitchFamily="34" charset="0"/>
+                  <a:buChar char="•"/>
+                </a:pPr>
+                <a:r>
+                  <a:rPr lang="en-US" sz="2400" b="1" dirty="0">
+                    <a:solidFill>
+                      <a:schemeClr val="accent6">
+                        <a:lumMod val="60000"/>
+                        <a:lumOff val="40000"/>
+                      </a:schemeClr>
+                    </a:solidFill>
+                  </a:rPr>
+                  <a:t>Independently</a:t>
+                </a:r>
+                <a:r>
+                  <a:rPr lang="en-US" sz="2400" dirty="0">
+                    <a:solidFill>
+                      <a:schemeClr val="accent6">
+                        <a:lumMod val="60000"/>
+                        <a:lumOff val="40000"/>
+                      </a:schemeClr>
+                    </a:solidFill>
+                  </a:rPr>
+                  <a:t> of each other, and</a:t>
+                </a:r>
+              </a:p>
+              <a:p>
+                <a:pPr marL="285750" indent="-285750">
+                  <a:buFont typeface="Arial" panose="020B0604020202020204" pitchFamily="34" charset="0"/>
+                  <a:buChar char="•"/>
+                </a:pPr>
+                <a:r>
+                  <a:rPr lang="en-US" sz="2400" dirty="0">
+                    <a:solidFill>
+                      <a:schemeClr val="accent6">
+                        <a:lumMod val="60000"/>
+                        <a:lumOff val="40000"/>
+                      </a:schemeClr>
+                    </a:solidFill>
+                  </a:rPr>
+                  <a:t>At a </a:t>
+                </a:r>
+                <a:r>
+                  <a:rPr lang="en-US" sz="2400" b="1" dirty="0">
+                    <a:solidFill>
+                      <a:schemeClr val="accent6">
+                        <a:lumMod val="60000"/>
+                        <a:lumOff val="40000"/>
+                      </a:schemeClr>
+                    </a:solidFill>
+                  </a:rPr>
+                  <a:t>constant average rate (λ or “lambda”)</a:t>
+                </a:r>
+                <a:r>
+                  <a:rPr lang="en-US" sz="2400" dirty="0">
+                    <a:solidFill>
+                      <a:schemeClr val="accent6">
+                        <a:lumMod val="60000"/>
+                        <a:lumOff val="40000"/>
+                      </a:schemeClr>
+                    </a:solidFill>
+                  </a:rPr>
+                  <a:t>.</a:t>
+                </a:r>
+              </a:p>
+              <a:p>
+                <a:pPr marL="285750" indent="-285750">
+                  <a:buFont typeface="Arial" panose="020B0604020202020204" pitchFamily="34" charset="0"/>
+                  <a:buChar char="•"/>
+                </a:pPr>
+                <a:endParaRPr lang="en-US" sz="2400" dirty="0">
+                  <a:solidFill>
+                    <a:schemeClr val="accent6">
+                      <a:lumMod val="60000"/>
+                      <a:lumOff val="40000"/>
+                    </a:schemeClr>
+                  </a:solidFill>
+                </a:endParaRPr>
+              </a:p>
+              <a:p>
+                <a:r>
+                  <a:rPr lang="en-US" sz="2400" dirty="0">
+                    <a:solidFill>
+                      <a:schemeClr val="accent6">
+                        <a:lumMod val="60000"/>
+                        <a:lumOff val="40000"/>
+                      </a:schemeClr>
+                    </a:solidFill>
+                  </a:rPr>
+                  <a:t>The probability of getting exactly </a:t>
+                </a:r>
+                <a:r>
+                  <a:rPr lang="en-US" sz="2400" b="1" dirty="0">
+                    <a:solidFill>
+                      <a:schemeClr val="accent6">
+                        <a:lumMod val="60000"/>
+                        <a:lumOff val="40000"/>
+                      </a:schemeClr>
+                    </a:solidFill>
+                  </a:rPr>
+                  <a:t>k</a:t>
+                </a:r>
+                <a:r>
+                  <a:rPr lang="en-US" sz="2400" dirty="0">
+                    <a:solidFill>
+                      <a:schemeClr val="accent6">
+                        <a:lumMod val="60000"/>
+                        <a:lumOff val="40000"/>
+                      </a:schemeClr>
+                    </a:solidFill>
+                  </a:rPr>
+                  <a:t> events in a fixed interval is:</a:t>
+                </a:r>
+              </a:p>
+              <a:p>
+                <a:endParaRPr lang="en-US" sz="2400" dirty="0">
+                  <a:solidFill>
+                    <a:schemeClr val="accent6">
+                      <a:lumMod val="60000"/>
+                      <a:lumOff val="40000"/>
+                    </a:schemeClr>
+                  </a:solidFill>
+                </a:endParaRPr>
+              </a:p>
+              <a:p>
+                <a:r>
+                  <a:rPr lang="en-US" sz="2400" dirty="0">
+                    <a:solidFill>
+                      <a:schemeClr val="accent6">
+                        <a:lumMod val="60000"/>
+                        <a:lumOff val="40000"/>
+                      </a:schemeClr>
+                    </a:solidFill>
+                  </a:rPr>
+                  <a:t>λ = average number of events (mean rate)</a:t>
+                </a:r>
+              </a:p>
+              <a:p>
+                <a14:m>
+                  <m:oMath xmlns:m="http://schemas.openxmlformats.org/officeDocument/2006/math">
+                    <m:r>
+                      <a:rPr lang="en-US" sz="2400" i="1">
+                        <a:solidFill>
+                          <a:schemeClr val="accent6">
+                            <a:lumMod val="60000"/>
+                            <a:lumOff val="40000"/>
+                          </a:schemeClr>
+                        </a:solidFill>
+                        <a:latin typeface="Cambria Math" panose="02040503050406030204" pitchFamily="18" charset="0"/>
+                      </a:rPr>
+                      <m:t>𝑘</m:t>
+                    </m:r>
+                  </m:oMath>
+                </a14:m>
+                <a:r>
+                  <a:rPr lang="en-US" sz="2400" dirty="0">
+                    <a:solidFill>
+                      <a:schemeClr val="accent6">
+                        <a:lumMod val="60000"/>
+                        <a:lumOff val="40000"/>
+                      </a:schemeClr>
+                    </a:solidFill>
+                  </a:rPr>
+                  <a:t>= number of occurrences</a:t>
+                </a:r>
+              </a:p>
+              <a:p>
+                <a14:m>
+                  <m:oMath xmlns:m="http://schemas.openxmlformats.org/officeDocument/2006/math">
+                    <m:r>
+                      <a:rPr lang="en-US" sz="2400" i="1">
+                        <a:solidFill>
+                          <a:schemeClr val="accent6">
+                            <a:lumMod val="60000"/>
+                            <a:lumOff val="40000"/>
+                          </a:schemeClr>
+                        </a:solidFill>
+                        <a:latin typeface="Cambria Math" panose="02040503050406030204" pitchFamily="18" charset="0"/>
+                      </a:rPr>
+                      <m:t>𝑒</m:t>
+                    </m:r>
+                  </m:oMath>
+                </a14:m>
+                <a:r>
+                  <a:rPr lang="en-US" sz="2400" dirty="0">
+                    <a:solidFill>
+                      <a:schemeClr val="accent6">
+                        <a:lumMod val="60000"/>
+                        <a:lumOff val="40000"/>
+                      </a:schemeClr>
+                    </a:solidFill>
+                  </a:rPr>
+                  <a:t>= 2.71828 (Euler’s number)</a:t>
+                </a:r>
+              </a:p>
+            </p:txBody>
+          </p:sp>
+        </mc:Choice>
+        <mc:Fallback>
+          <p:sp>
+            <p:nvSpPr>
+              <p:cNvPr id="5" name="TextBox 4">
+                <a:extLst>
+                  <a:ext uri="{FF2B5EF4-FFF2-40B4-BE49-F238E27FC236}">
+                    <a16:creationId xmlns:a16="http://schemas.microsoft.com/office/drawing/2014/main" id="{6A7C003B-68B0-26B1-87B8-1E4D38D72502}"/>
+                  </a:ext>
+                </a:extLst>
+              </p:cNvPr>
+              <p:cNvSpPr txBox="1">
+                <a:spLocks noRot="1" noChangeAspect="1" noMove="1" noResize="1" noEditPoints="1" noAdjustHandles="1" noChangeArrowheads="1" noChangeShapeType="1" noTextEdit="1"/>
+              </p:cNvSpPr>
+              <p:nvPr/>
+            </p:nvSpPr>
+            <p:spPr>
+              <a:xfrm>
+                <a:off x="233172" y="1015645"/>
+                <a:ext cx="11023092" cy="4524315"/>
+              </a:xfrm>
+              <a:prstGeom prst="rect">
+                <a:avLst/>
+              </a:prstGeom>
+              <a:blipFill>
+                <a:blip r:embed="rId2"/>
+                <a:stretch>
+                  <a:fillRect l="-829" t="-1078" r="-553" b="-2156"/>
+                </a:stretch>
+              </a:blipFill>
+            </p:spPr>
+            <p:txBody>
+              <a:bodyPr/>
+              <a:lstStyle/>
+              <a:p>
+                <a:r>
+                  <a:rPr lang="en-US">
+                    <a:noFill/>
+                  </a:rPr>
+                  <a:t> </a:t>
+                </a:r>
+              </a:p>
+            </p:txBody>
+          </p:sp>
+        </mc:Fallback>
+      </mc:AlternateContent>
+      <p:sp>
+        <p:nvSpPr>
+          <p:cNvPr id="6" name="TextBox 5">
+            <a:extLst>
+              <a:ext uri="{FF2B5EF4-FFF2-40B4-BE49-F238E27FC236}">
+                <a16:creationId xmlns:a16="http://schemas.microsoft.com/office/drawing/2014/main" id="{D81BCBAB-2C02-BF53-27AA-B5ECD1E85F5D}"/>
+              </a:ext>
+            </a:extLst>
+          </p:cNvPr>
+          <p:cNvSpPr txBox="1"/>
+          <p:nvPr/>
+        </p:nvSpPr>
+        <p:spPr>
+          <a:xfrm>
+            <a:off x="2002536" y="171950"/>
+            <a:ext cx="8215884" cy="400110"/>
+          </a:xfrm>
+          <a:prstGeom prst="rect">
+            <a:avLst/>
+          </a:prstGeom>
+          <a:noFill/>
+        </p:spPr>
+        <p:txBody>
+          <a:bodyPr wrap="square">
+            <a:spAutoFit/>
+          </a:bodyPr>
+          <a:lstStyle/>
+          <a:p>
+            <a:pPr algn="ctr"/>
+            <a:r>
+              <a:rPr lang="en-US" sz="2000" b="1" dirty="0">
+                <a:solidFill>
+                  <a:schemeClr val="accent6">
+                    <a:lumMod val="40000"/>
+                    <a:lumOff val="60000"/>
+                  </a:schemeClr>
+                </a:solidFill>
+              </a:rPr>
+              <a:t>Poisson Distribution</a:t>
+            </a:r>
+          </a:p>
+        </p:txBody>
+      </p:sp>
+      <p:pic>
+        <p:nvPicPr>
+          <p:cNvPr id="11" name="Picture 10">
+            <a:extLst>
+              <a:ext uri="{FF2B5EF4-FFF2-40B4-BE49-F238E27FC236}">
+                <a16:creationId xmlns:a16="http://schemas.microsoft.com/office/drawing/2014/main" id="{7E476D97-24EF-B2B8-A84E-2D6E356AA4E1}"/>
+              </a:ext>
+            </a:extLst>
+          </p:cNvPr>
+          <p:cNvPicPr>
+            <a:picLocks noChangeAspect="1"/>
+          </p:cNvPicPr>
+          <p:nvPr/>
+        </p:nvPicPr>
+        <p:blipFill>
+          <a:blip r:embed="rId3"/>
+          <a:stretch>
+            <a:fillRect/>
+          </a:stretch>
+        </p:blipFill>
+        <p:spPr>
+          <a:xfrm>
+            <a:off x="8359272" y="2203704"/>
+            <a:ext cx="2402166" cy="876837"/>
+          </a:xfrm>
+          <a:prstGeom prst="rect">
+            <a:avLst/>
+          </a:prstGeom>
+        </p:spPr>
+      </p:pic>
+      <p:pic>
+        <p:nvPicPr>
+          <p:cNvPr id="13" name="Picture 12">
+            <a:extLst>
+              <a:ext uri="{FF2B5EF4-FFF2-40B4-BE49-F238E27FC236}">
+                <a16:creationId xmlns:a16="http://schemas.microsoft.com/office/drawing/2014/main" id="{69815782-597C-F2D1-92CA-383124721565}"/>
+              </a:ext>
+            </a:extLst>
+          </p:cNvPr>
+          <p:cNvPicPr>
+            <a:picLocks noChangeAspect="1"/>
+          </p:cNvPicPr>
+          <p:nvPr/>
+        </p:nvPicPr>
+        <p:blipFill>
+          <a:blip r:embed="rId3"/>
+          <a:stretch>
+            <a:fillRect/>
+          </a:stretch>
+        </p:blipFill>
+        <p:spPr>
+          <a:xfrm>
+            <a:off x="7602396" y="0"/>
+            <a:ext cx="1957959" cy="714693"/>
+          </a:xfrm>
+          <a:prstGeom prst="rect">
+            <a:avLst/>
+          </a:prstGeom>
+        </p:spPr>
+      </p:pic>
+    </p:spTree>
+    <p:extLst>
+      <p:ext uri="{BB962C8B-B14F-4D97-AF65-F5344CB8AC3E}">
+        <p14:creationId xmlns:p14="http://schemas.microsoft.com/office/powerpoint/2010/main" val="102971711"/>
+      </p:ext>
+    </p:extLst>
+  </p:cSld>
+  <p:clrMapOvr>
+    <a:masterClrMapping/>
+  </p:clrMapOvr>
+</p:sld>
+</file>
+
+<file path=ppt/slides/slide4.xml><?xml version="1.0" encoding="utf-8"?>
 <p:sld xmlns:a="http://schemas.openxmlformats.org/drawingml/2006/main" xmlns:r="http://schemas.openxmlformats.org/officeDocument/2006/relationships" xmlns:p="http://schemas.openxmlformats.org/presentationml/2006/main">
   <p:cSld>
     <p:spTree>
@@ -6688,7 +6937,7 @@
             </p:nvSpPr>
             <p:spPr>
               <a:xfrm>
-                <a:off x="127254" y="922402"/>
+                <a:off x="127254" y="849250"/>
                 <a:ext cx="11937492" cy="5909310"/>
               </a:xfrm>
               <a:prstGeom prst="rect">
@@ -7122,7 +7371,7 @@
             </p:nvSpPr>
             <p:spPr>
               <a:xfrm>
-                <a:off x="127254" y="922402"/>
+                <a:off x="127254" y="849250"/>
                 <a:ext cx="11937492" cy="5909310"/>
               </a:xfrm>
               <a:prstGeom prst="rect">
@@ -7305,7 +7554,7 @@
         </p:blipFill>
         <p:spPr>
           <a:xfrm>
-            <a:off x="877824" y="4172444"/>
+            <a:off x="877824" y="4108436"/>
             <a:ext cx="2075125" cy="511864"/>
           </a:xfrm>
           <a:prstGeom prst="rect">
@@ -7439,7 +7688,7 @@
 </p:sld>
 </file>
 
-<file path=ppt/slides/slide4.xml><?xml version="1.0" encoding="utf-8"?>
+<file path=ppt/slides/slide5.xml><?xml version="1.0" encoding="utf-8"?>
 <p:sld xmlns:a="http://schemas.openxmlformats.org/drawingml/2006/main" xmlns:r="http://schemas.openxmlformats.org/officeDocument/2006/relationships" xmlns:p="http://schemas.openxmlformats.org/presentationml/2006/main">
   <p:cSld>
     <p:spTree>
@@ -7703,7 +7952,7 @@
 </p:sld>
 </file>
 
-<file path=ppt/slides/slide5.xml><?xml version="1.0" encoding="utf-8"?>
+<file path=ppt/slides/slide6.xml><?xml version="1.0" encoding="utf-8"?>
 <p:sld xmlns:a="http://schemas.openxmlformats.org/drawingml/2006/main" xmlns:r="http://schemas.openxmlformats.org/officeDocument/2006/relationships" xmlns:p="http://schemas.openxmlformats.org/presentationml/2006/main">
   <p:cSld>
     <p:spTree>
@@ -7741,7 +7990,7 @@
         <p:spPr>
           <a:xfrm>
             <a:off x="127254" y="922402"/>
-            <a:ext cx="11937492" cy="369332"/>
+            <a:ext cx="11937492" cy="400110"/>
           </a:xfrm>
           <a:prstGeom prst="rect">
             <a:avLst/>
@@ -7755,7 +8004,7 @@
           <a:lstStyle/>
           <a:p>
             <a:r>
-              <a:rPr lang="en-US" dirty="0">
+              <a:rPr lang="en-US" sz="2000" dirty="0">
                 <a:solidFill>
                   <a:schemeClr val="accent6">
                     <a:lumMod val="60000"/>
@@ -7937,7 +8186,7 @@
 </p:sld>
 </file>
 
-<file path=ppt/slides/slide6.xml><?xml version="1.0" encoding="utf-8"?>
+<file path=ppt/slides/slide7.xml><?xml version="1.0" encoding="utf-8"?>
 <p:sld xmlns:a="http://schemas.openxmlformats.org/drawingml/2006/main" xmlns:r="http://schemas.openxmlformats.org/officeDocument/2006/relationships" xmlns:p="http://schemas.openxmlformats.org/presentationml/2006/main">
   <p:cSld>
     <p:spTree>
@@ -7975,7 +8224,7 @@
         <p:spPr>
           <a:xfrm>
             <a:off x="127254" y="922402"/>
-            <a:ext cx="11937492" cy="2031325"/>
+            <a:ext cx="11937492" cy="2246769"/>
           </a:xfrm>
           <a:prstGeom prst="rect">
             <a:avLst/>
@@ -7989,7 +8238,7 @@
           <a:lstStyle/>
           <a:p>
             <a:r>
-              <a:rPr lang="en-US" b="1" dirty="0">
+              <a:rPr lang="en-US" sz="2000" b="1" dirty="0">
                 <a:solidFill>
                   <a:schemeClr val="accent6">
                     <a:lumMod val="60000"/>
@@ -8002,7 +8251,7 @@
           </a:p>
           <a:p>
             <a:r>
-              <a:rPr lang="en-US" dirty="0">
+              <a:rPr lang="en-US" sz="2000" dirty="0">
                 <a:solidFill>
                   <a:schemeClr val="accent6">
                     <a:lumMod val="60000"/>
@@ -8013,7 +8262,7 @@
               <a:t>Scientists have observed that, on average, </a:t>
             </a:r>
             <a:r>
-              <a:rPr lang="en-US" b="1" dirty="0">
+              <a:rPr lang="en-US" sz="2000" b="1" dirty="0">
                 <a:solidFill>
                   <a:schemeClr val="accent6">
                     <a:lumMod val="60000"/>
@@ -8024,7 +8273,7 @@
               <a:t>2 meteorites</a:t>
             </a:r>
             <a:r>
-              <a:rPr lang="en-US" dirty="0">
+              <a:rPr lang="en-US" sz="2000" dirty="0">
                 <a:solidFill>
                   <a:schemeClr val="accent6">
                     <a:lumMod val="60000"/>
@@ -8035,7 +8284,7 @@
               <a:t> large enough to be detected by ground-based sensors strike Earth </a:t>
             </a:r>
             <a:r>
-              <a:rPr lang="en-US" b="1" dirty="0">
+              <a:rPr lang="en-US" sz="2000" b="1" dirty="0">
                 <a:solidFill>
                   <a:schemeClr val="accent6">
                     <a:lumMod val="60000"/>
@@ -8046,7 +8295,7 @@
               <a:t>per year</a:t>
             </a:r>
             <a:r>
-              <a:rPr lang="en-US" dirty="0">
+              <a:rPr lang="en-US" sz="2000" dirty="0">
                 <a:solidFill>
                   <a:schemeClr val="accent6">
                     <a:lumMod val="60000"/>
@@ -8063,7 +8312,7 @@
               <a:buChar char="•"/>
             </a:pPr>
             <a:r>
-              <a:rPr lang="en-US" dirty="0">
+              <a:rPr lang="en-US" sz="2000" dirty="0">
                 <a:solidFill>
                   <a:schemeClr val="accent6">
                     <a:lumMod val="60000"/>
@@ -8074,7 +8323,7 @@
               <a:t>Occur </a:t>
             </a:r>
             <a:r>
-              <a:rPr lang="en-US" b="1" dirty="0">
+              <a:rPr lang="en-US" sz="2000" b="1" dirty="0">
                 <a:solidFill>
                   <a:schemeClr val="accent6">
                     <a:lumMod val="60000"/>
@@ -8085,7 +8334,7 @@
               <a:t>randomly and independently</a:t>
             </a:r>
             <a:r>
-              <a:rPr lang="en-US" dirty="0">
+              <a:rPr lang="en-US" sz="2000" dirty="0">
                 <a:solidFill>
                   <a:schemeClr val="accent6">
                     <a:lumMod val="60000"/>
@@ -8102,7 +8351,7 @@
               <a:buChar char="•"/>
             </a:pPr>
             <a:r>
-              <a:rPr lang="en-US" dirty="0">
+              <a:rPr lang="en-US" sz="2000" dirty="0">
                 <a:solidFill>
                   <a:schemeClr val="accent6">
                     <a:lumMod val="60000"/>
@@ -8113,7 +8362,7 @@
               <a:t>Happen at a </a:t>
             </a:r>
             <a:r>
-              <a:rPr lang="en-US" b="1" dirty="0">
+              <a:rPr lang="en-US" sz="2000" b="1" dirty="0">
                 <a:solidFill>
                   <a:schemeClr val="accent6">
                     <a:lumMod val="60000"/>
@@ -8124,7 +8373,7 @@
               <a:t>constant average rate (λ = 2 per year)</a:t>
             </a:r>
             <a:r>
-              <a:rPr lang="en-US" dirty="0">
+              <a:rPr lang="en-US" sz="2000" dirty="0">
                 <a:solidFill>
                   <a:schemeClr val="accent6">
                     <a:lumMod val="60000"/>
@@ -8137,7 +8386,7 @@
           </a:p>
           <a:p>
             <a:r>
-              <a:rPr lang="en-US" dirty="0">
+              <a:rPr lang="en-US" sz="2000" dirty="0">
                 <a:solidFill>
                   <a:schemeClr val="accent6">
                     <a:lumMod val="60000"/>
@@ -8148,7 +8397,7 @@
               <a:t>1) Find the probability that </a:t>
             </a:r>
             <a:r>
-              <a:rPr lang="en-US" b="1" dirty="0">
+              <a:rPr lang="en-US" sz="2000" b="1" dirty="0">
                 <a:solidFill>
                   <a:schemeClr val="accent6">
                     <a:lumMod val="60000"/>
@@ -8159,7 +8408,7 @@
               <a:t>2 or less meteorites</a:t>
             </a:r>
             <a:r>
-              <a:rPr lang="en-US" dirty="0">
+              <a:rPr lang="en-US" sz="2000" dirty="0">
                 <a:solidFill>
                   <a:schemeClr val="accent6">
                     <a:lumMod val="60000"/>
@@ -8172,7 +8421,7 @@
           </a:p>
           <a:p>
             <a:r>
-              <a:rPr lang="en-US" dirty="0">
+              <a:rPr lang="en-US" sz="2000" dirty="0">
                 <a:solidFill>
                   <a:schemeClr val="accent6">
                     <a:lumMod val="60000"/>
@@ -8183,7 +8432,7 @@
               <a:t>2) Find the probability that </a:t>
             </a:r>
             <a:r>
-              <a:rPr lang="en-US" b="1" dirty="0">
+              <a:rPr lang="en-US" sz="2000" b="1" dirty="0">
                 <a:solidFill>
                   <a:schemeClr val="accent6">
                     <a:lumMod val="60000"/>
@@ -8194,7 +8443,7 @@
               <a:t>3 or more meteorites</a:t>
             </a:r>
             <a:r>
-              <a:rPr lang="en-US" dirty="0">
+              <a:rPr lang="en-US" sz="2000" dirty="0">
                 <a:solidFill>
                   <a:schemeClr val="accent6">
                     <a:lumMod val="60000"/>
@@ -8294,8 +8543,8 @@
         </p:nvSpPr>
         <p:spPr>
           <a:xfrm>
-            <a:off x="86868" y="3189470"/>
-            <a:ext cx="8389620" cy="2585323"/>
+            <a:off x="86868" y="3500366"/>
+            <a:ext cx="8389620" cy="2862322"/>
           </a:xfrm>
           <a:prstGeom prst="rect">
             <a:avLst/>
@@ -8309,7 +8558,7 @@
           <a:lstStyle/>
           <a:p>
             <a:r>
-              <a:rPr lang="en-US" dirty="0">
+              <a:rPr lang="en-US" sz="2000" dirty="0">
                 <a:solidFill>
                   <a:schemeClr val="accent6">
                     <a:lumMod val="60000"/>
@@ -8322,7 +8571,7 @@
           </a:p>
           <a:p>
             <a:r>
-              <a:rPr lang="en-US" dirty="0">
+              <a:rPr lang="en-US" sz="2000" dirty="0">
                 <a:solidFill>
                   <a:schemeClr val="accent6">
                     <a:lumMod val="60000"/>
@@ -8333,7 +8582,7 @@
               <a:t>1) Probability that </a:t>
             </a:r>
             <a:r>
-              <a:rPr lang="en-US" b="1" dirty="0">
+              <a:rPr lang="en-US" sz="2000" b="1" dirty="0">
                 <a:solidFill>
                   <a:schemeClr val="accent6">
                     <a:lumMod val="60000"/>
@@ -8344,7 +8593,7 @@
               <a:t>2 or less meteorites</a:t>
             </a:r>
             <a:r>
-              <a:rPr lang="en-US" dirty="0">
+              <a:rPr lang="en-US" sz="2000" dirty="0">
                 <a:solidFill>
                   <a:schemeClr val="accent6">
                     <a:lumMod val="60000"/>
@@ -8357,7 +8606,7 @@
           </a:p>
           <a:p>
             <a:r>
-              <a:rPr lang="en-US" dirty="0">
+              <a:rPr lang="en-US" sz="2000" dirty="0">
                 <a:solidFill>
                   <a:schemeClr val="accent6">
                     <a:lumMod val="60000"/>
@@ -8369,7 +8618,7 @@
             </a:r>
           </a:p>
           <a:p>
-            <a:endParaRPr lang="en-US" dirty="0">
+            <a:endParaRPr lang="en-US" sz="2000" dirty="0">
               <a:solidFill>
                 <a:schemeClr val="accent6">
                   <a:lumMod val="60000"/>
@@ -8380,7 +8629,7 @@
           </a:p>
           <a:p>
             <a:r>
-              <a:rPr lang="en-US" dirty="0">
+              <a:rPr lang="en-US" sz="2000" dirty="0">
                 <a:solidFill>
                   <a:schemeClr val="accent6">
                     <a:lumMod val="60000"/>
@@ -8392,7 +8641,7 @@
             </a:r>
           </a:p>
           <a:p>
-            <a:endParaRPr lang="en-US" dirty="0">
+            <a:endParaRPr lang="en-US" sz="2000" dirty="0">
               <a:solidFill>
                 <a:schemeClr val="accent6">
                   <a:lumMod val="60000"/>
@@ -8403,7 +8652,7 @@
           </a:p>
           <a:p>
             <a:r>
-              <a:rPr lang="en-US" dirty="0">
+              <a:rPr lang="en-US" sz="2000" dirty="0">
                 <a:solidFill>
                   <a:schemeClr val="accent6">
                     <a:lumMod val="60000"/>
@@ -8415,7 +8664,7 @@
             </a:r>
           </a:p>
           <a:p>
-            <a:endParaRPr lang="en-US" dirty="0">
+            <a:endParaRPr lang="en-US" sz="2000" dirty="0">
               <a:solidFill>
                 <a:schemeClr val="accent6">
                   <a:lumMod val="60000"/>
@@ -8426,7 +8675,7 @@
           </a:p>
           <a:p>
             <a:r>
-              <a:rPr lang="en-US" dirty="0">
+              <a:rPr lang="en-US" sz="2000" dirty="0">
                 <a:solidFill>
                   <a:schemeClr val="accent6">
                     <a:lumMod val="60000"/>
@@ -8461,8 +8710,8 @@
         </p:blipFill>
         <p:spPr>
           <a:xfrm>
-            <a:off x="5159836" y="4126308"/>
-            <a:ext cx="1872327" cy="683436"/>
+            <a:off x="5575508" y="5095921"/>
+            <a:ext cx="2279615" cy="832104"/>
           </a:xfrm>
           <a:prstGeom prst="rect">
             <a:avLst/>
@@ -8542,7 +8791,7 @@
 </p:sld>
 </file>
 
-<file path=ppt/slides/slide7.xml><?xml version="1.0" encoding="utf-8"?>
+<file path=ppt/slides/slide8.xml><?xml version="1.0" encoding="utf-8"?>
 <p:sld xmlns:a="http://schemas.openxmlformats.org/drawingml/2006/main" xmlns:r="http://schemas.openxmlformats.org/officeDocument/2006/relationships" xmlns:p="http://schemas.openxmlformats.org/presentationml/2006/main">
   <p:cSld>
     <p:spTree>
@@ -8567,10 +8816,10 @@
       </p:grpSpPr>
       <p:pic>
         <p:nvPicPr>
-          <p:cNvPr id="11" name="Picture 10">
-            <a:extLst>
-              <a:ext uri="{FF2B5EF4-FFF2-40B4-BE49-F238E27FC236}">
-                <a16:creationId xmlns:a16="http://schemas.microsoft.com/office/drawing/2014/main" id="{77DAB529-6A03-57B7-FF93-A72F8673C516}"/>
+          <p:cNvPr id="7" name="Picture 6">
+            <a:extLst>
+              <a:ext uri="{FF2B5EF4-FFF2-40B4-BE49-F238E27FC236}">
+                <a16:creationId xmlns:a16="http://schemas.microsoft.com/office/drawing/2014/main" id="{D1FE5867-BE88-F588-66D5-7F0D16D27D34}"/>
               </a:ext>
             </a:extLst>
           </p:cNvPr>
@@ -8581,6 +8830,36 @@
         </p:nvPicPr>
         <p:blipFill>
           <a:blip r:embed="rId3"/>
+          <a:stretch>
+            <a:fillRect/>
+          </a:stretch>
+        </p:blipFill>
+        <p:spPr>
+          <a:xfrm>
+            <a:off x="5379555" y="2212849"/>
+            <a:ext cx="6606706" cy="4070866"/>
+          </a:xfrm>
+          <a:prstGeom prst="rect">
+            <a:avLst/>
+          </a:prstGeom>
+        </p:spPr>
+      </p:pic>
+      <p:pic>
+        <p:nvPicPr>
+          <p:cNvPr id="11" name="Picture 10">
+            <a:extLst>
+              <a:ext uri="{FF2B5EF4-FFF2-40B4-BE49-F238E27FC236}">
+                <a16:creationId xmlns:a16="http://schemas.microsoft.com/office/drawing/2014/main" id="{77DAB529-6A03-57B7-FF93-A72F8673C516}"/>
+              </a:ext>
+            </a:extLst>
+          </p:cNvPr>
+          <p:cNvPicPr>
+            <a:picLocks noChangeAspect="1"/>
+          </p:cNvPicPr>
+          <p:nvPr/>
+        </p:nvPicPr>
+        <p:blipFill>
+          <a:blip r:embed="rId4"/>
           <a:stretch>
             <a:fillRect/>
           </a:stretch>
@@ -8666,7 +8945,7 @@
           </a:bodyPr>
           <a:lstStyle/>
           <a:p>
-            <a:endParaRPr lang="en-US" dirty="0">
+            <a:endParaRPr lang="en-US" sz="2000" dirty="0">
               <a:solidFill>
                 <a:schemeClr val="accent6">
                   <a:lumMod val="60000"/>
@@ -8677,7 +8956,7 @@
           </a:p>
           <a:p>
             <a:r>
-              <a:rPr lang="en-US" dirty="0">
+              <a:rPr lang="en-US" sz="2000" dirty="0">
                 <a:solidFill>
                   <a:schemeClr val="accent6">
                     <a:lumMod val="60000"/>
@@ -8688,7 +8967,7 @@
               <a:t>2) Probability that </a:t>
             </a:r>
             <a:r>
-              <a:rPr lang="en-US" b="1" dirty="0">
+              <a:rPr lang="en-US" sz="2000" b="1" dirty="0">
                 <a:solidFill>
                   <a:schemeClr val="accent6">
                     <a:lumMod val="60000"/>
@@ -8699,7 +8978,7 @@
               <a:t>3 or more meteorites</a:t>
             </a:r>
             <a:r>
-              <a:rPr lang="en-US" dirty="0">
+              <a:rPr lang="en-US" sz="2000" dirty="0">
                 <a:solidFill>
                   <a:schemeClr val="accent6">
                     <a:lumMod val="60000"/>
@@ -8711,7 +8990,7 @@
             </a:r>
           </a:p>
           <a:p>
-            <a:endParaRPr lang="en-US" dirty="0">
+            <a:endParaRPr lang="en-US" sz="2000" dirty="0">
               <a:solidFill>
                 <a:schemeClr val="accent6">
                   <a:lumMod val="60000"/>
@@ -8722,7 +9001,7 @@
           </a:p>
           <a:p>
             <a:r>
-              <a:rPr lang="en-US" dirty="0">
+              <a:rPr lang="en-US" sz="2000" dirty="0">
                 <a:solidFill>
                   <a:schemeClr val="accent6">
                     <a:lumMod val="60000"/>
@@ -8734,7 +9013,7 @@
             </a:r>
           </a:p>
           <a:p>
-            <a:endParaRPr lang="en-US" dirty="0">
+            <a:endParaRPr lang="en-US" sz="2000" dirty="0">
               <a:solidFill>
                 <a:schemeClr val="accent6">
                   <a:lumMod val="60000"/>
@@ -8745,7 +9024,7 @@
           </a:p>
           <a:p>
             <a:r>
-              <a:rPr lang="en-US" dirty="0">
+              <a:rPr lang="en-US" sz="2000" dirty="0">
                 <a:solidFill>
                   <a:schemeClr val="accent6">
                     <a:lumMod val="60000"/>
@@ -8757,7 +9036,7 @@
             </a:r>
           </a:p>
           <a:p>
-            <a:endParaRPr lang="en-US" dirty="0">
+            <a:endParaRPr lang="en-US" sz="2000" dirty="0">
               <a:solidFill>
                 <a:schemeClr val="accent6">
                   <a:lumMod val="60000"/>
@@ -8768,7 +9047,7 @@
           </a:p>
           <a:p>
             <a:r>
-              <a:rPr lang="en-US" dirty="0">
+              <a:rPr lang="en-US" sz="2000" dirty="0">
                 <a:solidFill>
                   <a:schemeClr val="accent6">
                     <a:lumMod val="60000"/>
@@ -8780,7 +9059,7 @@
             </a:r>
           </a:p>
           <a:p>
-            <a:endParaRPr lang="en-US" dirty="0">
+            <a:endParaRPr lang="en-US" sz="2000" dirty="0">
               <a:solidFill>
                 <a:schemeClr val="accent6">
                   <a:lumMod val="60000"/>
@@ -8791,7 +9070,7 @@
           </a:p>
           <a:p>
             <a:r>
-              <a:rPr lang="en-US" dirty="0">
+              <a:rPr lang="en-US" sz="2000" dirty="0">
                 <a:solidFill>
                   <a:schemeClr val="accent6">
                     <a:lumMod val="60000"/>
@@ -8803,7 +9082,7 @@
             </a:r>
           </a:p>
           <a:p>
-            <a:endParaRPr lang="en-US" dirty="0">
+            <a:endParaRPr lang="en-US" sz="2000" dirty="0">
               <a:solidFill>
                 <a:schemeClr val="accent6">
                   <a:lumMod val="60000"/>
@@ -8813,7 +9092,7 @@
             </a:endParaRPr>
           </a:p>
           <a:p>
-            <a:endParaRPr lang="en-US" dirty="0">
+            <a:endParaRPr lang="en-US" sz="2000" dirty="0">
               <a:solidFill>
                 <a:schemeClr val="accent6">
                   <a:lumMod val="60000"/>
@@ -8823,7 +9102,7 @@
             </a:endParaRPr>
           </a:p>
           <a:p>
-            <a:endParaRPr lang="en-US" dirty="0">
+            <a:endParaRPr lang="en-US" sz="2000" dirty="0">
               <a:solidFill>
                 <a:schemeClr val="accent6">
                   <a:lumMod val="60000"/>
@@ -8833,31 +9112,11 @@
             </a:endParaRPr>
           </a:p>
           <a:p>
-            <a:endParaRPr lang="en-US" dirty="0">
-              <a:solidFill>
-                <a:schemeClr val="accent6">
-                  <a:lumMod val="60000"/>
-                  <a:lumOff val="40000"/>
-                </a:schemeClr>
-              </a:solidFill>
-            </a:endParaRPr>
-          </a:p>
-          <a:p>
-            <a:endParaRPr lang="en-US" dirty="0">
-              <a:solidFill>
-                <a:schemeClr val="accent6">
-                  <a:lumMod val="60000"/>
-                  <a:lumOff val="40000"/>
-                </a:schemeClr>
-              </a:solidFill>
-            </a:endParaRPr>
-          </a:p>
-          <a:p>
             <a:pPr>
               <a:buNone/>
             </a:pPr>
             <a:r>
-              <a:rPr lang="en-US" b="1" dirty="0">
+              <a:rPr lang="en-US" sz="2000" b="1" dirty="0">
                 <a:solidFill>
                   <a:schemeClr val="accent6">
                     <a:lumMod val="60000"/>
@@ -8868,7 +9127,7 @@
               <a:t>Side Note:</a:t>
             </a:r>
             <a:r>
-              <a:rPr lang="en-US" dirty="0">
+              <a:rPr lang="en-US" sz="2000" dirty="0">
                 <a:solidFill>
                   <a:schemeClr val="accent6">
                     <a:lumMod val="60000"/>
@@ -8884,7 +9143,7 @@
               <a:buNone/>
             </a:pPr>
             <a:r>
-              <a:rPr lang="en-US" dirty="0">
+              <a:rPr lang="en-US" sz="2000" dirty="0">
                 <a:solidFill>
                   <a:schemeClr val="accent6">
                     <a:lumMod val="60000"/>
@@ -8895,7 +9154,7 @@
               <a:t>space science for modeling </a:t>
             </a:r>
             <a:r>
-              <a:rPr lang="en-US" b="1" dirty="0">
+              <a:rPr lang="en-US" sz="2000" b="1" dirty="0">
                 <a:solidFill>
                   <a:schemeClr val="accent6">
                     <a:lumMod val="60000"/>
@@ -8911,7 +9170,7 @@
               <a:buNone/>
             </a:pPr>
             <a:r>
-              <a:rPr lang="en-US" b="1" dirty="0">
+              <a:rPr lang="en-US" sz="2000" b="1" dirty="0">
                 <a:solidFill>
                   <a:schemeClr val="accent6">
                     <a:lumMod val="60000"/>
@@ -8927,7 +9186,7 @@
               <a:buNone/>
             </a:pPr>
             <a:r>
-              <a:rPr lang="en-US" b="1" dirty="0">
+              <a:rPr lang="en-US" sz="2000" b="1" dirty="0">
                 <a:solidFill>
                   <a:schemeClr val="accent6">
                     <a:lumMod val="60000"/>
@@ -8938,7 +9197,7 @@
               <a:t>Cosmic ray </a:t>
             </a:r>
             <a:r>
-              <a:rPr lang="en-US" dirty="0">
+              <a:rPr lang="en-US" sz="2000" dirty="0">
                 <a:solidFill>
                   <a:schemeClr val="accent6">
                     <a:lumMod val="60000"/>
@@ -8949,7 +9208,7 @@
               <a:t>detections because these are </a:t>
             </a:r>
             <a:r>
-              <a:rPr lang="en-US" b="1" dirty="0">
+              <a:rPr lang="en-US" sz="2000" b="1" dirty="0">
                 <a:solidFill>
                   <a:schemeClr val="accent6">
                     <a:lumMod val="60000"/>
@@ -8965,7 +9224,7 @@
               <a:buNone/>
             </a:pPr>
             <a:r>
-              <a:rPr lang="en-US" b="1" dirty="0">
+              <a:rPr lang="en-US" sz="2000" b="1" dirty="0">
                 <a:solidFill>
                   <a:schemeClr val="accent6">
                     <a:lumMod val="60000"/>
@@ -8976,7 +9235,7 @@
               <a:t> independent events</a:t>
             </a:r>
             <a:r>
-              <a:rPr lang="en-US" dirty="0">
+              <a:rPr lang="en-US" sz="2000" dirty="0">
                 <a:solidFill>
                   <a:schemeClr val="accent6">
                     <a:lumMod val="60000"/>
@@ -8989,36 +9248,6 @@
           </a:p>
         </p:txBody>
       </p:sp>
-      <p:pic>
-        <p:nvPicPr>
-          <p:cNvPr id="7" name="Picture 6">
-            <a:extLst>
-              <a:ext uri="{FF2B5EF4-FFF2-40B4-BE49-F238E27FC236}">
-                <a16:creationId xmlns:a16="http://schemas.microsoft.com/office/drawing/2014/main" id="{D1FE5867-BE88-F588-66D5-7F0D16D27D34}"/>
-              </a:ext>
-            </a:extLst>
-          </p:cNvPr>
-          <p:cNvPicPr>
-            <a:picLocks noChangeAspect="1"/>
-          </p:cNvPicPr>
-          <p:nvPr/>
-        </p:nvPicPr>
-        <p:blipFill>
-          <a:blip r:embed="rId4"/>
-          <a:stretch>
-            <a:fillRect/>
-          </a:stretch>
-        </p:blipFill>
-        <p:spPr>
-          <a:xfrm>
-            <a:off x="5379555" y="2212849"/>
-            <a:ext cx="6606706" cy="4070866"/>
-          </a:xfrm>
-          <a:prstGeom prst="rect">
-            <a:avLst/>
-          </a:prstGeom>
-        </p:spPr>
-      </p:pic>
       <p:pic>
         <p:nvPicPr>
           <p:cNvPr id="2" name="Picture 1">
@@ -9062,7 +9291,7 @@
 </p:sld>
 </file>
 
-<file path=ppt/slides/slide8.xml><?xml version="1.0" encoding="utf-8"?>
+<file path=ppt/slides/slide9.xml><?xml version="1.0" encoding="utf-8"?>
 <p:sld xmlns:a="http://schemas.openxmlformats.org/drawingml/2006/main" xmlns:r="http://schemas.openxmlformats.org/officeDocument/2006/relationships" xmlns:p="http://schemas.openxmlformats.org/presentationml/2006/main">
   <p:cSld>
     <p:spTree>
@@ -9136,175 +9365,6 @@
     <p:extLst>
       <p:ext uri="{BB962C8B-B14F-4D97-AF65-F5344CB8AC3E}">
         <p14:creationId xmlns:p14="http://schemas.microsoft.com/office/powerpoint/2010/main" val="36201675"/>
-      </p:ext>
-    </p:extLst>
-  </p:cSld>
-  <p:clrMapOvr>
-    <a:masterClrMapping/>
-  </p:clrMapOvr>
-</p:sld>
-</file>
-
-<file path=ppt/slides/slide9.xml><?xml version="1.0" encoding="utf-8"?>
-<p:sld xmlns:a="http://schemas.openxmlformats.org/drawingml/2006/main" xmlns:r="http://schemas.openxmlformats.org/officeDocument/2006/relationships" xmlns:p="http://schemas.openxmlformats.org/presentationml/2006/main">
-  <p:cSld>
-    <p:spTree>
-      <p:nvGrpSpPr>
-        <p:cNvPr id="1" name="">
-          <a:extLst>
-            <a:ext uri="{FF2B5EF4-FFF2-40B4-BE49-F238E27FC236}">
-              <a16:creationId xmlns:a16="http://schemas.microsoft.com/office/drawing/2014/main" id="{8DD5416A-2A86-425A-C4C1-55D6D479F922}"/>
-            </a:ext>
-          </a:extLst>
-        </p:cNvPr>
-        <p:cNvGrpSpPr/>
-        <p:nvPr/>
-      </p:nvGrpSpPr>
-      <p:grpSpPr>
-        <a:xfrm>
-          <a:off x="0" y="0"/>
-          <a:ext cx="0" cy="0"/>
-          <a:chOff x="0" y="0"/>
-          <a:chExt cx="0" cy="0"/>
-        </a:xfrm>
-      </p:grpSpPr>
-      <p:sp>
-        <p:nvSpPr>
-          <p:cNvPr id="6" name="TextBox 5">
-            <a:extLst>
-              <a:ext uri="{FF2B5EF4-FFF2-40B4-BE49-F238E27FC236}">
-                <a16:creationId xmlns:a16="http://schemas.microsoft.com/office/drawing/2014/main" id="{F58747AF-4CDB-80FE-F3F0-6DBDFAB859CF}"/>
-              </a:ext>
-            </a:extLst>
-          </p:cNvPr>
-          <p:cNvSpPr txBox="1"/>
-          <p:nvPr/>
-        </p:nvSpPr>
-        <p:spPr>
-          <a:xfrm>
-            <a:off x="2002536" y="171950"/>
-            <a:ext cx="8215884" cy="400110"/>
-          </a:xfrm>
-          <a:prstGeom prst="rect">
-            <a:avLst/>
-          </a:prstGeom>
-          <a:noFill/>
-        </p:spPr>
-        <p:txBody>
-          <a:bodyPr wrap="square">
-            <a:spAutoFit/>
-          </a:bodyPr>
-          <a:lstStyle/>
-          <a:p>
-            <a:pPr algn="ctr"/>
-            <a:r>
-              <a:rPr lang="en-US" sz="2000" b="1" dirty="0">
-                <a:solidFill>
-                  <a:schemeClr val="accent6">
-                    <a:lumMod val="40000"/>
-                    <a:lumOff val="60000"/>
-                  </a:schemeClr>
-                </a:solidFill>
-              </a:rPr>
-              <a:t>Poisson Distribution</a:t>
-            </a:r>
-          </a:p>
-        </p:txBody>
-      </p:sp>
-      <p:pic>
-        <p:nvPicPr>
-          <p:cNvPr id="11" name="Picture 10">
-            <a:extLst>
-              <a:ext uri="{FF2B5EF4-FFF2-40B4-BE49-F238E27FC236}">
-                <a16:creationId xmlns:a16="http://schemas.microsoft.com/office/drawing/2014/main" id="{2BDCF185-2D42-DF60-E22E-7625CE71FC64}"/>
-              </a:ext>
-            </a:extLst>
-          </p:cNvPr>
-          <p:cNvPicPr>
-            <a:picLocks noChangeAspect="1"/>
-          </p:cNvPicPr>
-          <p:nvPr/>
-        </p:nvPicPr>
-        <p:blipFill>
-          <a:blip r:embed="rId2"/>
-          <a:stretch>
-            <a:fillRect/>
-          </a:stretch>
-        </p:blipFill>
-        <p:spPr>
-          <a:xfrm>
-            <a:off x="6509385" y="2585304"/>
-            <a:ext cx="1957959" cy="714693"/>
-          </a:xfrm>
-          <a:prstGeom prst="rect">
-            <a:avLst/>
-          </a:prstGeom>
-        </p:spPr>
-      </p:pic>
-      <p:pic>
-        <p:nvPicPr>
-          <p:cNvPr id="13" name="Picture 12">
-            <a:extLst>
-              <a:ext uri="{FF2B5EF4-FFF2-40B4-BE49-F238E27FC236}">
-                <a16:creationId xmlns:a16="http://schemas.microsoft.com/office/drawing/2014/main" id="{43AAC2F2-0FE1-1F05-53F3-2E60B6606FFE}"/>
-              </a:ext>
-            </a:extLst>
-          </p:cNvPr>
-          <p:cNvPicPr>
-            <a:picLocks noChangeAspect="1"/>
-          </p:cNvPicPr>
-          <p:nvPr/>
-        </p:nvPicPr>
-        <p:blipFill>
-          <a:blip r:embed="rId2"/>
-          <a:stretch>
-            <a:fillRect/>
-          </a:stretch>
-        </p:blipFill>
-        <p:spPr>
-          <a:xfrm>
-            <a:off x="7602396" y="0"/>
-            <a:ext cx="1957959" cy="714693"/>
-          </a:xfrm>
-          <a:prstGeom prst="rect">
-            <a:avLst/>
-          </a:prstGeom>
-        </p:spPr>
-      </p:pic>
-      <p:pic>
-        <p:nvPicPr>
-          <p:cNvPr id="3" name="Picture 2">
-            <a:extLst>
-              <a:ext uri="{FF2B5EF4-FFF2-40B4-BE49-F238E27FC236}">
-                <a16:creationId xmlns:a16="http://schemas.microsoft.com/office/drawing/2014/main" id="{A3E39F0D-F5AE-611F-AC9A-7CE08728B4D9}"/>
-              </a:ext>
-            </a:extLst>
-          </p:cNvPr>
-          <p:cNvPicPr>
-            <a:picLocks noChangeAspect="1"/>
-          </p:cNvPicPr>
-          <p:nvPr/>
-        </p:nvPicPr>
-        <p:blipFill>
-          <a:blip r:embed="rId3"/>
-          <a:stretch>
-            <a:fillRect/>
-          </a:stretch>
-        </p:blipFill>
-        <p:spPr>
-          <a:xfrm>
-            <a:off x="1787462" y="1097279"/>
-            <a:ext cx="7354683" cy="4871661"/>
-          </a:xfrm>
-          <a:prstGeom prst="rect">
-            <a:avLst/>
-          </a:prstGeom>
-        </p:spPr>
-      </p:pic>
-    </p:spTree>
-    <p:extLst>
-      <p:ext uri="{BB962C8B-B14F-4D97-AF65-F5344CB8AC3E}">
-        <p14:creationId xmlns:p14="http://schemas.microsoft.com/office/powerpoint/2010/main" val="2254600426"/>
       </p:ext>
     </p:extLst>
   </p:cSld>
